--- a/dist/초3/과학/힘과소리/초3_과학_힘과소리_02_소리의성질_학생용.pptx
+++ b/dist/초3/과학/힘과소리/초3_과학_힘과소리_02_소리의성질_학생용.pptx
@@ -122,13 +122,13 @@
   <p:extLst>
     <p:ext uri="{521415D9-36F7-43E2-AB2F-B90AF26B5E84}">
       <p14:sectionLst xmlns:p14="http://schemas.microsoft.com/office/powerpoint/2010/main">
-        <p14:section name="도입" id="{e502bedc-7b69-def4-361c-bf54a8928fe5}">
+        <p14:section name="도입" id="{2387e17d-eb24-6363-ec76-926b5700e512}">
           <p14:sldIdLst>
             <p14:sldId id="256"/>
             <p14:sldId id="257"/>
           </p14:sldIdLst>
         </p14:section>
-        <p14:section name="개념" id="{290005e5-7147-d36b-0259-9212a3b2dfd4}">
+        <p14:section name="개념" id="{752f383d-ee98-00b9-f8d0-e97fcb1f3bec}">
           <p14:sldIdLst>
             <p14:sldId id="258"/>
             <p14:sldId id="259"/>
@@ -137,7 +137,7 @@
             <p14:sldId id="266"/>
           </p14:sldIdLst>
         </p14:section>
-        <p14:section name="연습" id="{b4b547ea-538f-45e9-8c6e-1b9a0abd6150}">
+        <p14:section name="연습" id="{97181552-d1a6-d8ce-7665-ba6377783489}">
           <p14:sldIdLst>
             <p14:sldId id="262"/>
             <p14:sldId id="263"/>
@@ -147,23 +147,23 @@
             <p14:sldId id="268"/>
           </p14:sldIdLst>
         </p14:section>
-        <p14:section name="개념" id="{06faa9f0-684a-f7d1-d31b-9fefb6bc8be0}">
+        <p14:section name="개념" id="{7b727621-6862-8432-d544-5447634d9e21}">
           <p14:sldIdLst/>
         </p14:section>
-        <p14:section name="연습" id="{085421c0-2094-c409-9600-6273eb3bed30}">
+        <p14:section name="연습" id="{b639a2ba-b417-ea95-fac2-a112cbd3d028}">
           <p14:sldIdLst/>
         </p14:section>
-        <p14:section name="확인" id="{52114180-f59c-366a-4d4a-1b08114a58a2}">
+        <p14:section name="확인" id="{aa562d85-74f4-4fe8-58fa-751065c828d8}">
           <p14:sldIdLst>
             <p14:sldId id="269"/>
           </p14:sldIdLst>
         </p14:section>
-        <p14:section name="정리" id="{d689b351-8739-fb63-ddad-b6d14d84a0cf}">
+        <p14:section name="정리" id="{7762d76a-935d-d9b7-1538-6851ca609264}">
           <p14:sldIdLst>
             <p14:sldId id="270"/>
           </p14:sldIdLst>
         </p14:section>
-        <p14:section name="보충" id="{75551255-dde2-716d-a7a9-701682daad72}">
+        <p14:section name="보충" id="{d9504789-e9bd-eb98-d956-119feb4dd468}">
           <p14:sldIdLst>
             <p14:sldId id="271"/>
           </p14:sldIdLst>
@@ -5915,18 +5915,18 @@
           </p:nvPr>
         </p:nvGraphicFramePr>
         <p:xfrm>
-          <a:off x="1522476" y="2362200"/>
-          <a:ext cx="9144000" cy="914400"/>
+          <a:off x="1293876" y="2188210"/>
+          <a:ext cx="9601200" cy="914400"/>
         </p:xfrm>
         <a:graphic>
           <a:graphicData uri="http://schemas.openxmlformats.org/drawingml/2006/table">
             <a:tbl>
               <a:tblPr/>
               <a:tblGrid>
-                <a:gridCol w="5029200"/>
-                <a:gridCol w="4114800"/>
+                <a:gridCol w="5280660"/>
+                <a:gridCol w="4320540"/>
               </a:tblGrid>
-              <a:tr h="481584">
+              <a:tr h="551180">
                 <a:tc>
                   <a:txBody>
                     <a:bodyPr/>
@@ -5936,7 +5936,7 @@
                         <a:buNone/>
                       </a:pPr>
                       <a:r>
-                        <a:rPr lang="en-US" sz="2400" b="1" dirty="0">
+                        <a:rPr lang="en-US" sz="2800" b="1" dirty="0">
                           <a:solidFill>
                             <a:srgbClr val="1F2937"/>
                           </a:solidFill>
@@ -5946,7 +5946,7 @@
                         </a:rPr>
                         <a:t>해 본 것</a:t>
                       </a:r>
-                      <a:endParaRPr lang="en-US" sz="2400" dirty="0">
+                      <a:endParaRPr lang="en-US" sz="2800" dirty="0">
                         <a:latin typeface="맑은 고딕" charset="0"/>
                         <a:ea typeface="맑은 고딕" charset="0"/>
                         <a:cs typeface="맑은 고딕" charset="0"/>
@@ -6004,7 +6004,7 @@
                         <a:buNone/>
                       </a:pPr>
                       <a:r>
-                        <a:rPr lang="en-US" sz="2400" b="1" dirty="0">
+                        <a:rPr lang="en-US" sz="2800" b="1" dirty="0">
                           <a:solidFill>
                             <a:srgbClr val="1F2937"/>
                           </a:solidFill>
@@ -6014,7 +6014,7 @@
                         </a:rPr>
                         <a:t>결과</a:t>
                       </a:r>
-                      <a:endParaRPr lang="en-US" sz="2400" dirty="0">
+                      <a:endParaRPr lang="en-US" sz="2800" dirty="0">
                         <a:latin typeface="맑은 고딕" charset="0"/>
                         <a:ea typeface="맑은 고딕" charset="0"/>
                         <a:cs typeface="맑은 고딕" charset="0"/>
@@ -6064,7 +6064,7 @@
                   </a:tcPr>
                 </a:tc>
               </a:tr>
-              <a:tr h="481584">
+              <a:tr h="551180">
                 <a:tc>
                   <a:txBody>
                     <a:bodyPr/>
@@ -6074,7 +6074,7 @@
                         <a:buNone/>
                       </a:pPr>
                       <a:r>
-                        <a:rPr lang="en-US" sz="2400" dirty="0">
+                        <a:rPr lang="en-US" sz="2800" dirty="0">
                           <a:solidFill>
                             <a:srgbClr val="1F2937"/>
                           </a:solidFill>
@@ -6084,7 +6084,7 @@
                         </a:rPr>
                         <a:t>① 실을 팽팽하게</a:t>
                       </a:r>
-                      <a:endParaRPr lang="en-US" sz="2400" dirty="0">
+                      <a:endParaRPr lang="en-US" sz="2800" dirty="0">
                         <a:latin typeface="맑은 고딕" charset="0"/>
                         <a:ea typeface="맑은 고딕" charset="0"/>
                         <a:cs typeface="맑은 고딕" charset="0"/>
@@ -6142,7 +6142,7 @@
                         <a:buNone/>
                       </a:pPr>
                       <a:r>
-                        <a:rPr lang="en-US" sz="2400" dirty="0">
+                        <a:rPr lang="en-US" sz="2800" dirty="0">
                           <a:solidFill>
                             <a:srgbClr val="1F2937"/>
                           </a:solidFill>
@@ -6152,7 +6152,7 @@
                         </a:rPr>
                         <a:t>잘 들려요</a:t>
                       </a:r>
-                      <a:endParaRPr lang="en-US" sz="2400" dirty="0">
+                      <a:endParaRPr lang="en-US" sz="2800" dirty="0">
                         <a:latin typeface="맑은 고딕" charset="0"/>
                         <a:ea typeface="맑은 고딕" charset="0"/>
                         <a:cs typeface="맑은 고딕" charset="0"/>
@@ -6202,7 +6202,7 @@
                   </a:tcPr>
                 </a:tc>
               </a:tr>
-              <a:tr h="481584">
+              <a:tr h="551180">
                 <a:tc>
                   <a:txBody>
                     <a:bodyPr/>
@@ -6212,7 +6212,7 @@
                         <a:buNone/>
                       </a:pPr>
                       <a:r>
-                        <a:rPr lang="en-US" sz="2400" dirty="0">
+                        <a:rPr lang="en-US" sz="2800" dirty="0">
                           <a:solidFill>
                             <a:srgbClr val="1F2937"/>
                           </a:solidFill>
@@ -6222,7 +6222,7 @@
                         </a:rPr>
                         <a:t>② 실을 느슨하게</a:t>
                       </a:r>
-                      <a:endParaRPr lang="en-US" sz="2400" dirty="0">
+                      <a:endParaRPr lang="en-US" sz="2800" dirty="0">
                         <a:latin typeface="맑은 고딕" charset="0"/>
                         <a:ea typeface="맑은 고딕" charset="0"/>
                         <a:cs typeface="맑은 고딕" charset="0"/>
@@ -6280,7 +6280,7 @@
                         <a:buNone/>
                       </a:pPr>
                       <a:r>
-                        <a:rPr lang="en-US" sz="2400" dirty="0">
+                        <a:rPr lang="en-US" sz="2800" dirty="0">
                           <a:solidFill>
                             <a:srgbClr val="1F2937"/>
                           </a:solidFill>
@@ -6290,7 +6290,7 @@
                         </a:rPr>
                         <a:t>잘 안 들려요</a:t>
                       </a:r>
-                      <a:endParaRPr lang="en-US" sz="2400" dirty="0">
+                      <a:endParaRPr lang="en-US" sz="2800" dirty="0">
                         <a:latin typeface="맑은 고딕" charset="0"/>
                         <a:ea typeface="맑은 고딕" charset="0"/>
                         <a:cs typeface="맑은 고딕" charset="0"/>
@@ -6340,7 +6340,7 @@
                   </a:tcPr>
                 </a:tc>
               </a:tr>
-              <a:tr h="481584">
+              <a:tr h="551180">
                 <a:tc>
                   <a:txBody>
                     <a:bodyPr/>
@@ -6350,7 +6350,7 @@
                         <a:buNone/>
                       </a:pPr>
                       <a:r>
-                        <a:rPr lang="en-US" sz="2400" dirty="0">
+                        <a:rPr lang="en-US" sz="2800" dirty="0">
                           <a:solidFill>
                             <a:srgbClr val="1F2937"/>
                           </a:solidFill>
@@ -6360,7 +6360,7 @@
                         </a:rPr>
                         <a:t>③ 실 가운데를 잡음</a:t>
                       </a:r>
-                      <a:endParaRPr lang="en-US" sz="2400" dirty="0">
+                      <a:endParaRPr lang="en-US" sz="2800" dirty="0">
                         <a:latin typeface="맑은 고딕" charset="0"/>
                         <a:ea typeface="맑은 고딕" charset="0"/>
                         <a:cs typeface="맑은 고딕" charset="0"/>
@@ -6418,7 +6418,7 @@
                         <a:buNone/>
                       </a:pPr>
                       <a:r>
-                        <a:rPr lang="en-US" sz="2400" dirty="0">
+                        <a:rPr lang="en-US" sz="2800" dirty="0">
                           <a:solidFill>
                             <a:srgbClr val="1F2937"/>
                           </a:solidFill>
@@ -6428,7 +6428,7 @@
                         </a:rPr>
                         <a:t>거의 안 들려요</a:t>
                       </a:r>
-                      <a:endParaRPr lang="en-US" sz="2400" dirty="0">
+                      <a:endParaRPr lang="en-US" sz="2800" dirty="0">
                         <a:latin typeface="맑은 고딕" charset="0"/>
                         <a:ea typeface="맑은 고딕" charset="0"/>
                         <a:cs typeface="맑은 고딕" charset="0"/>
@@ -6478,7 +6478,7 @@
                   </a:tcPr>
                 </a:tc>
               </a:tr>
-              <a:tr h="481584">
+              <a:tr h="551180">
                 <a:tc>
                   <a:txBody>
                     <a:bodyPr/>
@@ -6488,7 +6488,7 @@
                         <a:buNone/>
                       </a:pPr>
                       <a:r>
-                        <a:rPr lang="en-US" sz="2400" dirty="0">
+                        <a:rPr lang="en-US" sz="2800" dirty="0">
                           <a:solidFill>
                             <a:srgbClr val="1F2937"/>
                           </a:solidFill>
@@ -6498,7 +6498,7 @@
                         </a:rPr>
                         <a:t>④ 책상에 귀 대기</a:t>
                       </a:r>
-                      <a:endParaRPr lang="en-US" sz="2400" dirty="0">
+                      <a:endParaRPr lang="en-US" sz="2800" dirty="0">
                         <a:latin typeface="맑은 고딕" charset="0"/>
                         <a:ea typeface="맑은 고딕" charset="0"/>
                         <a:cs typeface="맑은 고딕" charset="0"/>
@@ -6556,7 +6556,7 @@
                         <a:buNone/>
                       </a:pPr>
                       <a:r>
-                        <a:rPr lang="en-US" sz="2400" dirty="0">
+                        <a:rPr lang="en-US" sz="2800" dirty="0">
                           <a:solidFill>
                             <a:srgbClr val="1F2937"/>
                           </a:solidFill>
@@ -6566,7 +6566,7 @@
                         </a:rPr>
                         <a:t>똑똑 잘 들려요</a:t>
                       </a:r>
-                      <a:endParaRPr lang="en-US" sz="2400" dirty="0">
+                      <a:endParaRPr lang="en-US" sz="2800" dirty="0">
                         <a:latin typeface="맑은 고딕" charset="0"/>
                         <a:ea typeface="맑은 고딕" charset="0"/>
                         <a:cs typeface="맑은 고딕" charset="0"/>
@@ -11688,18 +11688,18 @@
           </p:nvPr>
         </p:nvGraphicFramePr>
         <p:xfrm>
-          <a:off x="1065276" y="2314956"/>
-          <a:ext cx="10058400" cy="914400"/>
+          <a:off x="836676" y="2183384"/>
+          <a:ext cx="10515600" cy="914400"/>
         </p:xfrm>
         <a:graphic>
           <a:graphicData uri="http://schemas.openxmlformats.org/drawingml/2006/table">
             <a:tbl>
               <a:tblPr/>
               <a:tblGrid>
-                <a:gridCol w="4526280"/>
-                <a:gridCol w="5532120"/>
+                <a:gridCol w="4732020"/>
+                <a:gridCol w="5783580"/>
               </a:tblGrid>
-              <a:tr h="481584">
+              <a:tr h="551180">
                 <a:tc>
                   <a:txBody>
                     <a:bodyPr/>
@@ -11709,7 +11709,7 @@
                         <a:buNone/>
                       </a:pPr>
                       <a:r>
-                        <a:rPr lang="en-US" sz="2400" b="1" dirty="0">
+                        <a:rPr lang="en-US" sz="2800" b="1" dirty="0">
                           <a:solidFill>
                             <a:srgbClr val="1F2937"/>
                           </a:solidFill>
@@ -11719,7 +11719,7 @@
                         </a:rPr>
                         <a:t>바꾼 것</a:t>
                       </a:r>
-                      <a:endParaRPr lang="en-US" sz="2400" dirty="0">
+                      <a:endParaRPr lang="en-US" sz="2800" dirty="0">
                         <a:latin typeface="맑은 고딕" charset="0"/>
                         <a:ea typeface="맑은 고딕" charset="0"/>
                         <a:cs typeface="맑은 고딕" charset="0"/>
@@ -11777,7 +11777,7 @@
                         <a:buNone/>
                       </a:pPr>
                       <a:r>
-                        <a:rPr lang="en-US" sz="2400" b="1" dirty="0">
+                        <a:rPr lang="en-US" sz="2800" b="1" dirty="0">
                           <a:solidFill>
                             <a:srgbClr val="1F2937"/>
                           </a:solidFill>
@@ -11787,7 +11787,7 @@
                         </a:rPr>
                         <a:t>결과</a:t>
                       </a:r>
-                      <a:endParaRPr lang="en-US" sz="2400" dirty="0">
+                      <a:endParaRPr lang="en-US" sz="2800" dirty="0">
                         <a:latin typeface="맑은 고딕" charset="0"/>
                         <a:ea typeface="맑은 고딕" charset="0"/>
                         <a:cs typeface="맑은 고딕" charset="0"/>
@@ -11837,7 +11837,7 @@
                   </a:tcPr>
                 </a:tc>
               </a:tr>
-              <a:tr h="853440">
+              <a:tr h="977392">
                 <a:tc>
                   <a:txBody>
                     <a:bodyPr/>
@@ -11847,7 +11847,7 @@
                         <a:buNone/>
                       </a:pPr>
                       <a:r>
-                        <a:rPr lang="en-US" sz="2400" dirty="0">
+                        <a:rPr lang="en-US" sz="2800" dirty="0">
                           <a:solidFill>
                             <a:srgbClr val="1F2937"/>
                           </a:solidFill>
@@ -11857,7 +11857,7 @@
                         </a:rPr>
                         <a:t>살짝 → 세게 튕기기</a:t>
                       </a:r>
-                      <a:endParaRPr lang="en-US" sz="2400" dirty="0">
+                      <a:endParaRPr lang="en-US" sz="2800" dirty="0">
                         <a:latin typeface="맑은 고딕" charset="0"/>
                         <a:ea typeface="맑은 고딕" charset="0"/>
                         <a:cs typeface="맑은 고딕" charset="0"/>
@@ -11915,7 +11915,7 @@
                         <a:buNone/>
                       </a:pPr>
                       <a:r>
-                        <a:rPr lang="en-US" sz="2400" dirty="0">
+                        <a:rPr lang="en-US" sz="2800" dirty="0">
                           <a:solidFill>
                             <a:srgbClr val="1F2937"/>
                           </a:solidFill>
@@ -11925,7 +11925,7 @@
                         </a:rPr>
                         <a:t>작은 소리 → 큰 소리</a:t>
                       </a:r>
-                      <a:endParaRPr lang="en-US" sz="2400" dirty="0">
+                      <a:endParaRPr lang="en-US" sz="2800" dirty="0">
                         <a:latin typeface="맑은 고딕" charset="0"/>
                         <a:ea typeface="맑은 고딕" charset="0"/>
                         <a:cs typeface="맑은 고딕" charset="0"/>
@@ -11936,7 +11936,7 @@
                         <a:buNone/>
                       </a:pPr>
                       <a:r>
-                        <a:rPr lang="en-US" sz="2400" dirty="0">
+                        <a:rPr lang="en-US" sz="2800" dirty="0">
                           <a:solidFill>
                             <a:srgbClr val="1F2937"/>
                           </a:solidFill>
@@ -11946,7 +11946,7 @@
                         </a:rPr>
                         <a:t>(자가 더 크게 떨려요)</a:t>
                       </a:r>
-                      <a:endParaRPr lang="en-US" sz="2400" dirty="0">
+                      <a:endParaRPr lang="en-US" sz="2800" dirty="0">
                         <a:latin typeface="맑은 고딕" charset="0"/>
                         <a:ea typeface="맑은 고딕" charset="0"/>
                         <a:cs typeface="맑은 고딕" charset="0"/>
@@ -11996,7 +11996,7 @@
                   </a:tcPr>
                 </a:tc>
               </a:tr>
-              <a:tr h="481584">
+              <a:tr h="551180">
                 <a:tc>
                   <a:txBody>
                     <a:bodyPr/>
@@ -12006,7 +12006,7 @@
                         <a:buNone/>
                       </a:pPr>
                       <a:r>
-                        <a:rPr lang="en-US" sz="2400" dirty="0">
+                        <a:rPr lang="en-US" sz="2800" dirty="0">
                           <a:solidFill>
                             <a:srgbClr val="1F2937"/>
                           </a:solidFill>
@@ -12016,7 +12016,7 @@
                         </a:rPr>
                         <a:t>나온 길이 20 cm → 10 cm</a:t>
                       </a:r>
-                      <a:endParaRPr lang="en-US" sz="2400" dirty="0">
+                      <a:endParaRPr lang="en-US" sz="2800" dirty="0">
                         <a:latin typeface="맑은 고딕" charset="0"/>
                         <a:ea typeface="맑은 고딕" charset="0"/>
                         <a:cs typeface="맑은 고딕" charset="0"/>
@@ -12074,7 +12074,7 @@
                         <a:buNone/>
                       </a:pPr>
                       <a:r>
-                        <a:rPr lang="en-US" sz="2400" dirty="0">
+                        <a:rPr lang="en-US" sz="2800" dirty="0">
                           <a:solidFill>
                             <a:srgbClr val="1F2937"/>
                           </a:solidFill>
@@ -12084,7 +12084,7 @@
                         </a:rPr>
                         <a:t>낮은 소리 → 높은 소리</a:t>
                       </a:r>
-                      <a:endParaRPr lang="en-US" sz="2400" dirty="0">
+                      <a:endParaRPr lang="en-US" sz="2800" dirty="0">
                         <a:latin typeface="맑은 고딕" charset="0"/>
                         <a:ea typeface="맑은 고딕" charset="0"/>
                         <a:cs typeface="맑은 고딕" charset="0"/>

--- a/dist/초3/과학/힘과소리/초3_과학_힘과소리_02_소리의성질_학생용.pptx
+++ b/dist/초3/과학/힘과소리/초3_과학_힘과소리_02_소리의성질_학생용.pptx
@@ -122,13 +122,13 @@
   <p:extLst>
     <p:ext uri="{521415D9-36F7-43E2-AB2F-B90AF26B5E84}">
       <p14:sectionLst xmlns:p14="http://schemas.microsoft.com/office/powerpoint/2010/main">
-        <p14:section name="도입" id="{2387e17d-eb24-6363-ec76-926b5700e512}">
+        <p14:section name="도입" id="{eceeb8b6-e70e-b479-310a-39495b6ec060}">
           <p14:sldIdLst>
             <p14:sldId id="256"/>
             <p14:sldId id="257"/>
           </p14:sldIdLst>
         </p14:section>
-        <p14:section name="개념" id="{752f383d-ee98-00b9-f8d0-e97fcb1f3bec}">
+        <p14:section name="개념" id="{43520f67-28cb-c472-8cdf-b9c715b4525a}">
           <p14:sldIdLst>
             <p14:sldId id="258"/>
             <p14:sldId id="259"/>
@@ -137,7 +137,7 @@
             <p14:sldId id="266"/>
           </p14:sldIdLst>
         </p14:section>
-        <p14:section name="연습" id="{97181552-d1a6-d8ce-7665-ba6377783489}">
+        <p14:section name="연습" id="{693934eb-f688-a5c0-0895-d00b21276158}">
           <p14:sldIdLst>
             <p14:sldId id="262"/>
             <p14:sldId id="263"/>
@@ -147,23 +147,23 @@
             <p14:sldId id="268"/>
           </p14:sldIdLst>
         </p14:section>
-        <p14:section name="개념" id="{7b727621-6862-8432-d544-5447634d9e21}">
+        <p14:section name="개념" id="{0ac2973c-6a67-bc2f-18d2-833a3cf5912a}">
           <p14:sldIdLst/>
         </p14:section>
-        <p14:section name="연습" id="{b639a2ba-b417-ea95-fac2-a112cbd3d028}">
+        <p14:section name="연습" id="{e5749254-1e9c-2353-509d-88679d61508a}">
           <p14:sldIdLst/>
         </p14:section>
-        <p14:section name="확인" id="{aa562d85-74f4-4fe8-58fa-751065c828d8}">
+        <p14:section name="확인" id="{897f26e0-3120-4c42-ef46-1f32ac822e2f}">
           <p14:sldIdLst>
             <p14:sldId id="269"/>
           </p14:sldIdLst>
         </p14:section>
-        <p14:section name="정리" id="{7762d76a-935d-d9b7-1538-6851ca609264}">
+        <p14:section name="정리" id="{4f282f2a-b37b-eab9-bb3f-af1940a65301}">
           <p14:sldIdLst>
             <p14:sldId id="270"/>
           </p14:sldIdLst>
         </p14:section>
-        <p14:section name="보충" id="{d9504789-e9bd-eb98-d956-119feb4dd468}">
+        <p14:section name="보충" id="{867f4ed1-4629-33f4-7e73-4a3aabf80594}">
           <p14:sldIdLst>
             <p14:sldId id="271"/>
           </p14:sldIdLst>

--- a/dist/초3/과학/힘과소리/초3_과학_힘과소리_02_소리의성질_학생용.pptx
+++ b/dist/초3/과학/힘과소리/초3_과학_힘과소리_02_소리의성질_학생용.pptx
@@ -122,13 +122,13 @@
   <p:extLst>
     <p:ext uri="{521415D9-36F7-43E2-AB2F-B90AF26B5E84}">
       <p14:sectionLst xmlns:p14="http://schemas.microsoft.com/office/powerpoint/2010/main">
-        <p14:section name="도입" id="{eceeb8b6-e70e-b479-310a-39495b6ec060}">
+        <p14:section name="도입" id="{37a2361a-6e42-b444-2813-8c21d50c6f40}">
           <p14:sldIdLst>
             <p14:sldId id="256"/>
             <p14:sldId id="257"/>
           </p14:sldIdLst>
         </p14:section>
-        <p14:section name="개념" id="{43520f67-28cb-c472-8cdf-b9c715b4525a}">
+        <p14:section name="개념" id="{3ca3cf8a-4d0c-5548-2f32-f304b87b712f}">
           <p14:sldIdLst>
             <p14:sldId id="258"/>
             <p14:sldId id="259"/>
@@ -137,7 +137,7 @@
             <p14:sldId id="266"/>
           </p14:sldIdLst>
         </p14:section>
-        <p14:section name="연습" id="{693934eb-f688-a5c0-0895-d00b21276158}">
+        <p14:section name="연습" id="{b6dc7024-2ee1-1213-4de8-af58b339c6f3}">
           <p14:sldIdLst>
             <p14:sldId id="262"/>
             <p14:sldId id="263"/>
@@ -147,23 +147,23 @@
             <p14:sldId id="268"/>
           </p14:sldIdLst>
         </p14:section>
-        <p14:section name="개념" id="{0ac2973c-6a67-bc2f-18d2-833a3cf5912a}">
+        <p14:section name="개념" id="{cea4b2db-dedb-24fe-f7f7-837a95bddb5f}">
           <p14:sldIdLst/>
         </p14:section>
-        <p14:section name="연습" id="{e5749254-1e9c-2353-509d-88679d61508a}">
+        <p14:section name="연습" id="{5d8089b7-628a-f64e-10df-1e262b4483b7}">
           <p14:sldIdLst/>
         </p14:section>
-        <p14:section name="확인" id="{897f26e0-3120-4c42-ef46-1f32ac822e2f}">
+        <p14:section name="확인" id="{00c0d857-5a0b-4454-2a25-ae58a452103c}">
           <p14:sldIdLst>
             <p14:sldId id="269"/>
           </p14:sldIdLst>
         </p14:section>
-        <p14:section name="정리" id="{4f282f2a-b37b-eab9-bb3f-af1940a65301}">
+        <p14:section name="정리" id="{11ab52ff-388f-b2b4-7a7f-71c55d0fd742}">
           <p14:sldIdLst>
             <p14:sldId id="270"/>
           </p14:sldIdLst>
         </p14:section>
-        <p14:section name="보충" id="{867f4ed1-4629-33f4-7e73-4a3aabf80594}">
+        <p14:section name="보충" id="{2b38f174-fb1f-866f-dac4-ae9adf6be130}">
           <p14:sldIdLst>
             <p14:sldId id="271"/>
           </p14:sldIdLst>
